--- a/tests/golden/visual/composition/v3_comparative_matrix/deck.pptx
+++ b/tests/golden/visual/composition/v3_comparative_matrix/deck.pptx
@@ -910,7 +910,7 @@
         <p:spPr>
           <a:xfrm>
             <a:off x="640080" y="411480"/>
-            <a:ext cx="7863840" cy="457200"/>
+            <a:ext cx="7863840" cy="601218"/>
           </a:xfrm>
           <a:prstGeom prst="rect">
             <a:avLst/>
@@ -948,8 +948,8 @@
         </p:nvSpPr>
         <p:spPr>
           <a:xfrm>
-            <a:off x="640080" y="944880"/>
-            <a:ext cx="2545080" cy="1546479"/>
+            <a:off x="640080" y="1088898"/>
+            <a:ext cx="2545080" cy="1467269"/>
           </a:xfrm>
           <a:prstGeom prst="rect">
             <a:avLst/>
@@ -957,11 +957,11 @@
           <a:solidFill>
             <a:srgbClr val="FFFFFF"/>
           </a:solidFill>
-          <a:ln w="12700">
+          <a:ln w="19050">
             <a:solidFill>
-              <a:srgbClr val="8B4513"/>
+              <a:srgbClr val="C47B2B"/>
             </a:solidFill>
-            <a:prstDash val="solid"/>
+            <a:prstDash val="dash"/>
           </a:ln>
         </p:spPr>
       </p:sp>
@@ -973,7 +973,7 @@
         </p:nvSpPr>
         <p:spPr>
           <a:xfrm>
-            <a:off x="777240" y="1535240"/>
+            <a:off x="777240" y="1639653"/>
             <a:ext cx="2270760" cy="365760"/>
           </a:xfrm>
           <a:prstGeom prst="rect">
@@ -998,7 +998,7 @@
                 <a:ea typeface="Microsoft YaHei" pitchFamily="34" charset="-122"/>
                 <a:cs typeface="Microsoft YaHei" pitchFamily="34" charset="-120"/>
               </a:rPr>
-              <a:t>图片占位</a:t>
+              <a:t>素材缺失/路径未解析</a:t>
             </a:r>
             <a:endParaRPr lang="en-US" sz="1200" dirty="0"/>
           </a:p>
@@ -1012,8 +1012,8 @@
         </p:nvSpPr>
         <p:spPr>
           <a:xfrm>
-            <a:off x="640080" y="2529459"/>
-            <a:ext cx="2545080" cy="1265301"/>
+            <a:off x="640080" y="2594267"/>
+            <a:ext cx="2545080" cy="1200493"/>
           </a:xfrm>
           <a:prstGeom prst="rect">
             <a:avLst/>
@@ -1102,8 +1102,8 @@
         </p:nvSpPr>
         <p:spPr>
           <a:xfrm>
-            <a:off x="3299460" y="944880"/>
-            <a:ext cx="2545080" cy="1546479"/>
+            <a:off x="3299460" y="1088898"/>
+            <a:ext cx="2545080" cy="1467269"/>
           </a:xfrm>
           <a:prstGeom prst="rect">
             <a:avLst/>
@@ -1111,11 +1111,11 @@
           <a:solidFill>
             <a:srgbClr val="FFFFFF"/>
           </a:solidFill>
-          <a:ln w="12700">
+          <a:ln w="19050">
             <a:solidFill>
-              <a:srgbClr val="8B4513"/>
+              <a:srgbClr val="C47B2B"/>
             </a:solidFill>
-            <a:prstDash val="solid"/>
+            <a:prstDash val="dash"/>
           </a:ln>
         </p:spPr>
       </p:sp>
@@ -1127,7 +1127,7 @@
         </p:nvSpPr>
         <p:spPr>
           <a:xfrm>
-            <a:off x="3436620" y="1535240"/>
+            <a:off x="3436620" y="1639653"/>
             <a:ext cx="2270760" cy="365760"/>
           </a:xfrm>
           <a:prstGeom prst="rect">
@@ -1152,7 +1152,7 @@
                 <a:ea typeface="Microsoft YaHei" pitchFamily="34" charset="-122"/>
                 <a:cs typeface="Microsoft YaHei" pitchFamily="34" charset="-120"/>
               </a:rPr>
-              <a:t>图片占位</a:t>
+              <a:t>素材缺失/路径未解析</a:t>
             </a:r>
             <a:endParaRPr lang="en-US" sz="1200" dirty="0"/>
           </a:p>
@@ -1166,8 +1166,8 @@
         </p:nvSpPr>
         <p:spPr>
           <a:xfrm>
-            <a:off x="3299460" y="2529459"/>
-            <a:ext cx="2545080" cy="1265301"/>
+            <a:off x="3299460" y="2594267"/>
+            <a:ext cx="2545080" cy="1200493"/>
           </a:xfrm>
           <a:prstGeom prst="rect">
             <a:avLst/>
@@ -1256,8 +1256,8 @@
         </p:nvSpPr>
         <p:spPr>
           <a:xfrm>
-            <a:off x="5958840" y="944880"/>
-            <a:ext cx="2545080" cy="1546479"/>
+            <a:off x="5958840" y="1088898"/>
+            <a:ext cx="2545080" cy="1467269"/>
           </a:xfrm>
           <a:prstGeom prst="rect">
             <a:avLst/>
@@ -1265,11 +1265,11 @@
           <a:solidFill>
             <a:srgbClr val="FFFFFF"/>
           </a:solidFill>
-          <a:ln w="12700">
+          <a:ln w="19050">
             <a:solidFill>
-              <a:srgbClr val="8B4513"/>
+              <a:srgbClr val="C47B2B"/>
             </a:solidFill>
-            <a:prstDash val="solid"/>
+            <a:prstDash val="dash"/>
           </a:ln>
         </p:spPr>
       </p:sp>
@@ -1281,7 +1281,7 @@
         </p:nvSpPr>
         <p:spPr>
           <a:xfrm>
-            <a:off x="6096000" y="1535240"/>
+            <a:off x="6096000" y="1639653"/>
             <a:ext cx="2270760" cy="365760"/>
           </a:xfrm>
           <a:prstGeom prst="rect">
@@ -1306,7 +1306,7 @@
                 <a:ea typeface="Microsoft YaHei" pitchFamily="34" charset="-122"/>
                 <a:cs typeface="Microsoft YaHei" pitchFamily="34" charset="-120"/>
               </a:rPr>
-              <a:t>图片占位</a:t>
+              <a:t>素材缺失/路径未解析</a:t>
             </a:r>
             <a:endParaRPr lang="en-US" sz="1200" dirty="0"/>
           </a:p>
@@ -1320,8 +1320,8 @@
         </p:nvSpPr>
         <p:spPr>
           <a:xfrm>
-            <a:off x="5958840" y="2529459"/>
-            <a:ext cx="2545080" cy="1265301"/>
+            <a:off x="5958840" y="2594267"/>
+            <a:ext cx="2545080" cy="1200493"/>
           </a:xfrm>
           <a:prstGeom prst="rect">
             <a:avLst/>

--- a/tests/golden/visual/composition/v3_comparative_matrix/deck.pptx
+++ b/tests/golden/visual/composition/v3_comparative_matrix/deck.pptx
@@ -910,7 +910,7 @@
         <p:spPr>
           <a:xfrm>
             <a:off x="640080" y="411480"/>
-            <a:ext cx="7863840" cy="601218"/>
+            <a:ext cx="7863840" cy="621792"/>
           </a:xfrm>
           <a:prstGeom prst="rect">
             <a:avLst/>
@@ -948,8 +948,8 @@
         </p:nvSpPr>
         <p:spPr>
           <a:xfrm>
-            <a:off x="640080" y="1088898"/>
-            <a:ext cx="2545080" cy="1467269"/>
+            <a:off x="640080" y="1109472"/>
+            <a:ext cx="2545080" cy="1455953"/>
           </a:xfrm>
           <a:prstGeom prst="rect">
             <a:avLst/>
@@ -973,7 +973,7 @@
         </p:nvSpPr>
         <p:spPr>
           <a:xfrm>
-            <a:off x="777240" y="1639653"/>
+            <a:off x="777240" y="1654569"/>
             <a:ext cx="2270760" cy="365760"/>
           </a:xfrm>
           <a:prstGeom prst="rect">
@@ -1012,8 +1012,8 @@
         </p:nvSpPr>
         <p:spPr>
           <a:xfrm>
-            <a:off x="640080" y="2594267"/>
-            <a:ext cx="2545080" cy="1200493"/>
+            <a:off x="640080" y="2603525"/>
+            <a:ext cx="2545080" cy="1191235"/>
           </a:xfrm>
           <a:prstGeom prst="rect">
             <a:avLst/>
@@ -1102,8 +1102,8 @@
         </p:nvSpPr>
         <p:spPr>
           <a:xfrm>
-            <a:off x="3299460" y="1088898"/>
-            <a:ext cx="2545080" cy="1467269"/>
+            <a:off x="3299460" y="1109472"/>
+            <a:ext cx="2545080" cy="1455953"/>
           </a:xfrm>
           <a:prstGeom prst="rect">
             <a:avLst/>
@@ -1127,7 +1127,7 @@
         </p:nvSpPr>
         <p:spPr>
           <a:xfrm>
-            <a:off x="3436620" y="1639653"/>
+            <a:off x="3436620" y="1654569"/>
             <a:ext cx="2270760" cy="365760"/>
           </a:xfrm>
           <a:prstGeom prst="rect">
@@ -1166,8 +1166,8 @@
         </p:nvSpPr>
         <p:spPr>
           <a:xfrm>
-            <a:off x="3299460" y="2594267"/>
-            <a:ext cx="2545080" cy="1200493"/>
+            <a:off x="3299460" y="2603525"/>
+            <a:ext cx="2545080" cy="1191235"/>
           </a:xfrm>
           <a:prstGeom prst="rect">
             <a:avLst/>
@@ -1256,8 +1256,8 @@
         </p:nvSpPr>
         <p:spPr>
           <a:xfrm>
-            <a:off x="5958840" y="1088898"/>
-            <a:ext cx="2545080" cy="1467269"/>
+            <a:off x="5958840" y="1109472"/>
+            <a:ext cx="2545080" cy="1455953"/>
           </a:xfrm>
           <a:prstGeom prst="rect">
             <a:avLst/>
@@ -1281,7 +1281,7 @@
         </p:nvSpPr>
         <p:spPr>
           <a:xfrm>
-            <a:off x="6096000" y="1639653"/>
+            <a:off x="6096000" y="1654569"/>
             <a:ext cx="2270760" cy="365760"/>
           </a:xfrm>
           <a:prstGeom prst="rect">
@@ -1320,8 +1320,8 @@
         </p:nvSpPr>
         <p:spPr>
           <a:xfrm>
-            <a:off x="5958840" y="2594267"/>
-            <a:ext cx="2545080" cy="1200493"/>
+            <a:off x="5958840" y="2603525"/>
+            <a:ext cx="2545080" cy="1191235"/>
           </a:xfrm>
           <a:prstGeom prst="rect">
             <a:avLst/>

--- a/tests/golden/visual/composition/v3_comparative_matrix/deck.pptx
+++ b/tests/golden/visual/composition/v3_comparative_matrix/deck.pptx
@@ -910,7 +910,7 @@
         <p:spPr>
           <a:xfrm>
             <a:off x="640080" y="411480"/>
-            <a:ext cx="7863840" cy="621792"/>
+            <a:ext cx="7863840" cy="601218"/>
           </a:xfrm>
           <a:prstGeom prst="rect">
             <a:avLst/>
@@ -948,8 +948,8 @@
         </p:nvSpPr>
         <p:spPr>
           <a:xfrm>
-            <a:off x="640080" y="1109472"/>
-            <a:ext cx="2545080" cy="1455953"/>
+            <a:off x="640080" y="1088898"/>
+            <a:ext cx="2545080" cy="1467269"/>
           </a:xfrm>
           <a:prstGeom prst="rect">
             <a:avLst/>
@@ -973,7 +973,7 @@
         </p:nvSpPr>
         <p:spPr>
           <a:xfrm>
-            <a:off x="777240" y="1654569"/>
+            <a:off x="777240" y="1639653"/>
             <a:ext cx="2270760" cy="365760"/>
           </a:xfrm>
           <a:prstGeom prst="rect">
@@ -1012,8 +1012,8 @@
         </p:nvSpPr>
         <p:spPr>
           <a:xfrm>
-            <a:off x="640080" y="2603525"/>
-            <a:ext cx="2545080" cy="1191235"/>
+            <a:off x="640080" y="2594267"/>
+            <a:ext cx="2545080" cy="1200493"/>
           </a:xfrm>
           <a:prstGeom prst="rect">
             <a:avLst/>
@@ -1102,8 +1102,8 @@
         </p:nvSpPr>
         <p:spPr>
           <a:xfrm>
-            <a:off x="3299460" y="1109472"/>
-            <a:ext cx="2545080" cy="1455953"/>
+            <a:off x="3299460" y="1088898"/>
+            <a:ext cx="2545080" cy="1467269"/>
           </a:xfrm>
           <a:prstGeom prst="rect">
             <a:avLst/>
@@ -1127,7 +1127,7 @@
         </p:nvSpPr>
         <p:spPr>
           <a:xfrm>
-            <a:off x="3436620" y="1654569"/>
+            <a:off x="3436620" y="1639653"/>
             <a:ext cx="2270760" cy="365760"/>
           </a:xfrm>
           <a:prstGeom prst="rect">
@@ -1166,8 +1166,8 @@
         </p:nvSpPr>
         <p:spPr>
           <a:xfrm>
-            <a:off x="3299460" y="2603525"/>
-            <a:ext cx="2545080" cy="1191235"/>
+            <a:off x="3299460" y="2594267"/>
+            <a:ext cx="2545080" cy="1200493"/>
           </a:xfrm>
           <a:prstGeom prst="rect">
             <a:avLst/>
@@ -1256,8 +1256,8 @@
         </p:nvSpPr>
         <p:spPr>
           <a:xfrm>
-            <a:off x="5958840" y="1109472"/>
-            <a:ext cx="2545080" cy="1455953"/>
+            <a:off x="5958840" y="1088898"/>
+            <a:ext cx="2545080" cy="1467269"/>
           </a:xfrm>
           <a:prstGeom prst="rect">
             <a:avLst/>
@@ -1281,7 +1281,7 @@
         </p:nvSpPr>
         <p:spPr>
           <a:xfrm>
-            <a:off x="6096000" y="1654569"/>
+            <a:off x="6096000" y="1639653"/>
             <a:ext cx="2270760" cy="365760"/>
           </a:xfrm>
           <a:prstGeom prst="rect">
@@ -1320,8 +1320,8 @@
         </p:nvSpPr>
         <p:spPr>
           <a:xfrm>
-            <a:off x="5958840" y="2603525"/>
-            <a:ext cx="2545080" cy="1191235"/>
+            <a:off x="5958840" y="2594267"/>
+            <a:ext cx="2545080" cy="1200493"/>
           </a:xfrm>
           <a:prstGeom prst="rect">
             <a:avLst/>

--- a/tests/golden/visual/composition/v3_comparative_matrix/deck.pptx
+++ b/tests/golden/visual/composition/v3_comparative_matrix/deck.pptx
@@ -580,7 +580,7 @@
     <p:bg>
       <p:bgPr>
         <a:solidFill>
-          <a:srgbClr val="F7F6F3"/>
+          <a:srgbClr val="D9E2EA"/>
         </a:solidFill>
       </p:bgPr>
     </p:bg>
@@ -909,8 +909,8 @@
         </p:nvSpPr>
         <p:spPr>
           <a:xfrm>
-            <a:off x="640080" y="411480"/>
-            <a:ext cx="7863840" cy="601218"/>
+            <a:off x="502920" y="347472"/>
+            <a:ext cx="8138160" cy="594360"/>
           </a:xfrm>
           <a:prstGeom prst="rect">
             <a:avLst/>
@@ -926,9 +926,9 @@
               <a:buNone/>
             </a:pPr>
             <a:r>
-              <a:rPr lang="en-US" sz="3400" b="1" dirty="0">
+              <a:rPr lang="en-US" sz="2000" b="1" dirty="0">
                 <a:solidFill>
-                  <a:srgbClr val="1A1A1A"/>
+                  <a:srgbClr val="1B3A4B"/>
                 </a:solidFill>
                 <a:latin typeface="Microsoft YaHei" pitchFamily="34" charset="0"/>
                 <a:ea typeface="Microsoft YaHei" pitchFamily="34" charset="-122"/>
@@ -936,7 +936,7 @@
               </a:rPr>
               <a:t>三个既有图书馆更新案例比较</a:t>
             </a:r>
-            <a:endParaRPr lang="en-US" sz="3400" dirty="0"/>
+            <a:endParaRPr lang="en-US" sz="2000" dirty="0"/>
           </a:p>
         </p:txBody>
       </p:sp>
@@ -948,14 +948,14 @@
         </p:nvSpPr>
         <p:spPr>
           <a:xfrm>
-            <a:off x="640080" y="1088898"/>
-            <a:ext cx="2545080" cy="1467269"/>
+            <a:off x="502920" y="1018032"/>
+            <a:ext cx="2636520" cy="1541450"/>
           </a:xfrm>
           <a:prstGeom prst="rect">
             <a:avLst/>
           </a:prstGeom>
           <a:solidFill>
-            <a:srgbClr val="FFFFFF"/>
+            <a:srgbClr val="F3F7FA"/>
           </a:solidFill>
           <a:ln w="19050">
             <a:solidFill>
@@ -973,8 +973,8 @@
         </p:nvSpPr>
         <p:spPr>
           <a:xfrm>
-            <a:off x="777240" y="1639653"/>
-            <a:ext cx="2270760" cy="365760"/>
+            <a:off x="640080" y="1605877"/>
+            <a:ext cx="2362200" cy="365760"/>
           </a:xfrm>
           <a:prstGeom prst="rect">
             <a:avLst/>
@@ -992,7 +992,7 @@
             <a:r>
               <a:rPr lang="en-US" sz="1200" dirty="0">
                 <a:solidFill>
-                  <a:srgbClr val="777777"/>
+                  <a:srgbClr val="6A7D8C"/>
                 </a:solidFill>
                 <a:latin typeface="Microsoft YaHei" pitchFamily="34" charset="0"/>
                 <a:ea typeface="Microsoft YaHei" pitchFamily="34" charset="-122"/>
@@ -1012,8 +1012,8 @@
         </p:nvSpPr>
         <p:spPr>
           <a:xfrm>
-            <a:off x="640080" y="2594267"/>
-            <a:ext cx="2545080" cy="1200493"/>
+            <a:off x="502920" y="2597582"/>
+            <a:ext cx="2636520" cy="1261186"/>
           </a:xfrm>
           <a:prstGeom prst="rect">
             <a:avLst/>
@@ -1029,9 +1029,9 @@
               <a:buNone/>
             </a:pPr>
             <a:r>
-              <a:rPr lang="en-US" sz="1600" dirty="0">
+              <a:rPr lang="en-US" sz="1400" dirty="0">
                 <a:solidFill>
-                  <a:srgbClr val="1A1A1A"/>
+                  <a:srgbClr val="132533"/>
                 </a:solidFill>
                 <a:latin typeface="Microsoft YaHei" pitchFamily="34" charset="0"/>
                 <a:ea typeface="Microsoft YaHei" pitchFamily="34" charset="-122"/>
@@ -1039,16 +1039,16 @@
               </a:rPr>
               <a:t>案例A：中庭再生</a:t>
             </a:r>
-            <a:endParaRPr lang="en-US" sz="1600" dirty="0"/>
+            <a:endParaRPr lang="en-US" sz="1400" dirty="0"/>
           </a:p>
           <a:p>
             <a:pPr algn="l" indent="0" marL="0">
               <a:buNone/>
             </a:pPr>
             <a:r>
-              <a:rPr lang="en-US" sz="1600" dirty="0">
+              <a:rPr lang="en-US" sz="1400" dirty="0">
                 <a:solidFill>
-                  <a:srgbClr val="1A1A1A"/>
+                  <a:srgbClr val="132533"/>
                 </a:solidFill>
                 <a:latin typeface="Microsoft YaHei" pitchFamily="34" charset="0"/>
                 <a:ea typeface="Microsoft YaHei" pitchFamily="34" charset="-122"/>
@@ -1056,16 +1056,16 @@
               </a:rPr>
               <a:t>· 空间策略</a:t>
             </a:r>
-            <a:endParaRPr lang="en-US" sz="1600" dirty="0"/>
+            <a:endParaRPr lang="en-US" sz="1400" dirty="0"/>
           </a:p>
           <a:p>
             <a:pPr algn="l" indent="0" marL="0">
               <a:buNone/>
             </a:pPr>
             <a:r>
-              <a:rPr lang="en-US" sz="1600" dirty="0">
+              <a:rPr lang="en-US" sz="1400" dirty="0">
                 <a:solidFill>
-                  <a:srgbClr val="1A1A1A"/>
+                  <a:srgbClr val="132533"/>
                 </a:solidFill>
                 <a:latin typeface="Microsoft YaHei" pitchFamily="34" charset="0"/>
                 <a:ea typeface="Microsoft YaHei" pitchFamily="34" charset="-122"/>
@@ -1073,16 +1073,16 @@
               </a:rPr>
               <a:t>· 运营模式</a:t>
             </a:r>
-            <a:endParaRPr lang="en-US" sz="1600" dirty="0"/>
+            <a:endParaRPr lang="en-US" sz="1400" dirty="0"/>
           </a:p>
           <a:p>
             <a:pPr algn="l" indent="0" marL="0">
               <a:buNone/>
             </a:pPr>
             <a:r>
-              <a:rPr lang="en-US" sz="1600" dirty="0">
+              <a:rPr lang="en-US" sz="1400" dirty="0">
                 <a:solidFill>
-                  <a:srgbClr val="1A1A1A"/>
+                  <a:srgbClr val="132533"/>
                 </a:solidFill>
                 <a:latin typeface="Microsoft YaHei" pitchFamily="34" charset="0"/>
                 <a:ea typeface="Microsoft YaHei" pitchFamily="34" charset="-122"/>
@@ -1090,7 +1090,7 @@
               </a:rPr>
               <a:t>· 公众可达性</a:t>
             </a:r>
-            <a:endParaRPr lang="en-US" sz="1600" dirty="0"/>
+            <a:endParaRPr lang="en-US" sz="1400" dirty="0"/>
           </a:p>
         </p:txBody>
       </p:sp>
@@ -1102,14 +1102,14 @@
         </p:nvSpPr>
         <p:spPr>
           <a:xfrm>
-            <a:off x="3299460" y="1088898"/>
-            <a:ext cx="2545080" cy="1467269"/>
+            <a:off x="3253740" y="1018032"/>
+            <a:ext cx="2636520" cy="1541450"/>
           </a:xfrm>
           <a:prstGeom prst="rect">
             <a:avLst/>
           </a:prstGeom>
           <a:solidFill>
-            <a:srgbClr val="FFFFFF"/>
+            <a:srgbClr val="F3F7FA"/>
           </a:solidFill>
           <a:ln w="19050">
             <a:solidFill>
@@ -1127,8 +1127,8 @@
         </p:nvSpPr>
         <p:spPr>
           <a:xfrm>
-            <a:off x="3436620" y="1639653"/>
-            <a:ext cx="2270760" cy="365760"/>
+            <a:off x="3390900" y="1605877"/>
+            <a:ext cx="2362200" cy="365760"/>
           </a:xfrm>
           <a:prstGeom prst="rect">
             <a:avLst/>
@@ -1146,7 +1146,7 @@
             <a:r>
               <a:rPr lang="en-US" sz="1200" dirty="0">
                 <a:solidFill>
-                  <a:srgbClr val="777777"/>
+                  <a:srgbClr val="6A7D8C"/>
                 </a:solidFill>
                 <a:latin typeface="Microsoft YaHei" pitchFamily="34" charset="0"/>
                 <a:ea typeface="Microsoft YaHei" pitchFamily="34" charset="-122"/>
@@ -1166,8 +1166,8 @@
         </p:nvSpPr>
         <p:spPr>
           <a:xfrm>
-            <a:off x="3299460" y="2594267"/>
-            <a:ext cx="2545080" cy="1200493"/>
+            <a:off x="3253740" y="2597582"/>
+            <a:ext cx="2636520" cy="1261186"/>
           </a:xfrm>
           <a:prstGeom prst="rect">
             <a:avLst/>
@@ -1183,9 +1183,9 @@
               <a:buNone/>
             </a:pPr>
             <a:r>
-              <a:rPr lang="en-US" sz="1600" dirty="0">
+              <a:rPr lang="en-US" sz="1400" dirty="0">
                 <a:solidFill>
-                  <a:srgbClr val="1A1A1A"/>
+                  <a:srgbClr val="132533"/>
                 </a:solidFill>
                 <a:latin typeface="Microsoft YaHei" pitchFamily="34" charset="0"/>
                 <a:ea typeface="Microsoft YaHei" pitchFamily="34" charset="-122"/>
@@ -1193,16 +1193,16 @@
               </a:rPr>
               <a:t>案例B：街道界面</a:t>
             </a:r>
-            <a:endParaRPr lang="en-US" sz="1600" dirty="0"/>
+            <a:endParaRPr lang="en-US" sz="1400" dirty="0"/>
           </a:p>
           <a:p>
             <a:pPr algn="l" indent="0" marL="0">
               <a:buNone/>
             </a:pPr>
             <a:r>
-              <a:rPr lang="en-US" sz="1600" dirty="0">
+              <a:rPr lang="en-US" sz="1400" dirty="0">
                 <a:solidFill>
-                  <a:srgbClr val="1A1A1A"/>
+                  <a:srgbClr val="132533"/>
                 </a:solidFill>
                 <a:latin typeface="Microsoft YaHei" pitchFamily="34" charset="0"/>
                 <a:ea typeface="Microsoft YaHei" pitchFamily="34" charset="-122"/>
@@ -1210,16 +1210,16 @@
               </a:rPr>
               <a:t>· 空间策略</a:t>
             </a:r>
-            <a:endParaRPr lang="en-US" sz="1600" dirty="0"/>
+            <a:endParaRPr lang="en-US" sz="1400" dirty="0"/>
           </a:p>
           <a:p>
             <a:pPr algn="l" indent="0" marL="0">
               <a:buNone/>
             </a:pPr>
             <a:r>
-              <a:rPr lang="en-US" sz="1600" dirty="0">
+              <a:rPr lang="en-US" sz="1400" dirty="0">
                 <a:solidFill>
-                  <a:srgbClr val="1A1A1A"/>
+                  <a:srgbClr val="132533"/>
                 </a:solidFill>
                 <a:latin typeface="Microsoft YaHei" pitchFamily="34" charset="0"/>
                 <a:ea typeface="Microsoft YaHei" pitchFamily="34" charset="-122"/>
@@ -1227,16 +1227,16 @@
               </a:rPr>
               <a:t>· 运营模式</a:t>
             </a:r>
-            <a:endParaRPr lang="en-US" sz="1600" dirty="0"/>
+            <a:endParaRPr lang="en-US" sz="1400" dirty="0"/>
           </a:p>
           <a:p>
             <a:pPr algn="l" indent="0" marL="0">
               <a:buNone/>
             </a:pPr>
             <a:r>
-              <a:rPr lang="en-US" sz="1600" dirty="0">
+              <a:rPr lang="en-US" sz="1400" dirty="0">
                 <a:solidFill>
-                  <a:srgbClr val="1A1A1A"/>
+                  <a:srgbClr val="132533"/>
                 </a:solidFill>
                 <a:latin typeface="Microsoft YaHei" pitchFamily="34" charset="0"/>
                 <a:ea typeface="Microsoft YaHei" pitchFamily="34" charset="-122"/>
@@ -1244,7 +1244,7 @@
               </a:rPr>
               <a:t>· 公众可达性</a:t>
             </a:r>
-            <a:endParaRPr lang="en-US" sz="1600" dirty="0"/>
+            <a:endParaRPr lang="en-US" sz="1400" dirty="0"/>
           </a:p>
         </p:txBody>
       </p:sp>
@@ -1256,14 +1256,14 @@
         </p:nvSpPr>
         <p:spPr>
           <a:xfrm>
-            <a:off x="5958840" y="1088898"/>
-            <a:ext cx="2545080" cy="1467269"/>
+            <a:off x="6004560" y="1018032"/>
+            <a:ext cx="2636520" cy="1541450"/>
           </a:xfrm>
           <a:prstGeom prst="rect">
             <a:avLst/>
           </a:prstGeom>
           <a:solidFill>
-            <a:srgbClr val="FFFFFF"/>
+            <a:srgbClr val="F3F7FA"/>
           </a:solidFill>
           <a:ln w="19050">
             <a:solidFill>
@@ -1281,8 +1281,8 @@
         </p:nvSpPr>
         <p:spPr>
           <a:xfrm>
-            <a:off x="6096000" y="1639653"/>
-            <a:ext cx="2270760" cy="365760"/>
+            <a:off x="6141720" y="1605877"/>
+            <a:ext cx="2362200" cy="365760"/>
           </a:xfrm>
           <a:prstGeom prst="rect">
             <a:avLst/>
@@ -1300,7 +1300,7 @@
             <a:r>
               <a:rPr lang="en-US" sz="1200" dirty="0">
                 <a:solidFill>
-                  <a:srgbClr val="777777"/>
+                  <a:srgbClr val="6A7D8C"/>
                 </a:solidFill>
                 <a:latin typeface="Microsoft YaHei" pitchFamily="34" charset="0"/>
                 <a:ea typeface="Microsoft YaHei" pitchFamily="34" charset="-122"/>
@@ -1320,8 +1320,8 @@
         </p:nvSpPr>
         <p:spPr>
           <a:xfrm>
-            <a:off x="5958840" y="2594267"/>
-            <a:ext cx="2545080" cy="1200493"/>
+            <a:off x="6004560" y="2597582"/>
+            <a:ext cx="2636520" cy="1261186"/>
           </a:xfrm>
           <a:prstGeom prst="rect">
             <a:avLst/>
@@ -1337,9 +1337,9 @@
               <a:buNone/>
             </a:pPr>
             <a:r>
-              <a:rPr lang="en-US" sz="1600" dirty="0">
+              <a:rPr lang="en-US" sz="1400" dirty="0">
                 <a:solidFill>
-                  <a:srgbClr val="1A1A1A"/>
+                  <a:srgbClr val="132533"/>
                 </a:solidFill>
                 <a:latin typeface="Microsoft YaHei" pitchFamily="34" charset="0"/>
                 <a:ea typeface="Microsoft YaHei" pitchFamily="34" charset="-122"/>
@@ -1347,16 +1347,16 @@
               </a:rPr>
               <a:t>案例 3</a:t>
             </a:r>
-            <a:endParaRPr lang="en-US" sz="1600" dirty="0"/>
+            <a:endParaRPr lang="en-US" sz="1400" dirty="0"/>
           </a:p>
           <a:p>
             <a:pPr algn="l" indent="0" marL="0">
               <a:buNone/>
             </a:pPr>
             <a:r>
-              <a:rPr lang="en-US" sz="1600" dirty="0">
+              <a:rPr lang="en-US" sz="1400" dirty="0">
                 <a:solidFill>
-                  <a:srgbClr val="1A1A1A"/>
+                  <a:srgbClr val="132533"/>
                 </a:solidFill>
                 <a:latin typeface="Microsoft YaHei" pitchFamily="34" charset="0"/>
                 <a:ea typeface="Microsoft YaHei" pitchFamily="34" charset="-122"/>
@@ -1364,16 +1364,16 @@
               </a:rPr>
               <a:t>· 空间策略</a:t>
             </a:r>
-            <a:endParaRPr lang="en-US" sz="1600" dirty="0"/>
+            <a:endParaRPr lang="en-US" sz="1400" dirty="0"/>
           </a:p>
           <a:p>
             <a:pPr algn="l" indent="0" marL="0">
               <a:buNone/>
             </a:pPr>
             <a:r>
-              <a:rPr lang="en-US" sz="1600" dirty="0">
+              <a:rPr lang="en-US" sz="1400" dirty="0">
                 <a:solidFill>
-                  <a:srgbClr val="1A1A1A"/>
+                  <a:srgbClr val="132533"/>
                 </a:solidFill>
                 <a:latin typeface="Microsoft YaHei" pitchFamily="34" charset="0"/>
                 <a:ea typeface="Microsoft YaHei" pitchFamily="34" charset="-122"/>
@@ -1381,16 +1381,16 @@
               </a:rPr>
               <a:t>· 运营模式</a:t>
             </a:r>
-            <a:endParaRPr lang="en-US" sz="1600" dirty="0"/>
+            <a:endParaRPr lang="en-US" sz="1400" dirty="0"/>
           </a:p>
           <a:p>
             <a:pPr algn="l" indent="0" marL="0">
               <a:buNone/>
             </a:pPr>
             <a:r>
-              <a:rPr lang="en-US" sz="1600" dirty="0">
+              <a:rPr lang="en-US" sz="1400" dirty="0">
                 <a:solidFill>
-                  <a:srgbClr val="1A1A1A"/>
+                  <a:srgbClr val="132533"/>
                 </a:solidFill>
                 <a:latin typeface="Microsoft YaHei" pitchFamily="34" charset="0"/>
                 <a:ea typeface="Microsoft YaHei" pitchFamily="34" charset="-122"/>
@@ -1398,7 +1398,7 @@
               </a:rPr>
               <a:t>· 公众可达性</a:t>
             </a:r>
-            <a:endParaRPr lang="en-US" sz="1600" dirty="0"/>
+            <a:endParaRPr lang="en-US" sz="1400" dirty="0"/>
           </a:p>
         </p:txBody>
       </p:sp>
@@ -1410,8 +1410,8 @@
         </p:nvSpPr>
         <p:spPr>
           <a:xfrm>
-            <a:off x="640080" y="3909060"/>
-            <a:ext cx="7863840" cy="502920"/>
+            <a:off x="502920" y="3973068"/>
+            <a:ext cx="8138160" cy="502920"/>
           </a:xfrm>
           <a:prstGeom prst="rect">
             <a:avLst/>
@@ -1427,9 +1427,9 @@
               <a:buNone/>
             </a:pPr>
             <a:r>
-              <a:rPr lang="en-US" sz="1800" dirty="0">
+              <a:rPr lang="en-US" sz="1400" b="1" dirty="0">
                 <a:solidFill>
-                  <a:srgbClr val="4A4A4A"/>
+                  <a:srgbClr val="1B3A4B"/>
                 </a:solidFill>
                 <a:latin typeface="Microsoft YaHei" pitchFamily="34" charset="0"/>
                 <a:ea typeface="Microsoft YaHei" pitchFamily="34" charset="-122"/>
@@ -1437,7 +1437,7 @@
               </a:rPr>
               <a:t>既有图书馆更新应优先重建公共性与可达性，而非单纯扩容。</a:t>
             </a:r>
-            <a:endParaRPr lang="en-US" sz="1800" dirty="0"/>
+            <a:endParaRPr lang="en-US" sz="1400" dirty="0"/>
           </a:p>
         </p:txBody>
       </p:sp>
@@ -1449,8 +1449,8 @@
         </p:nvSpPr>
         <p:spPr>
           <a:xfrm>
-            <a:off x="640080" y="4530852"/>
-            <a:ext cx="5504688" cy="201168"/>
+            <a:off x="502920" y="4594860"/>
+            <a:ext cx="5696712" cy="201168"/>
           </a:xfrm>
           <a:prstGeom prst="rect">
             <a:avLst/>
@@ -1468,7 +1468,7 @@
             <a:r>
               <a:rPr lang="en-US" sz="800" dirty="0">
                 <a:solidFill>
-                  <a:srgbClr val="777777"/>
+                  <a:srgbClr val="6A7D8C"/>
                 </a:solidFill>
                 <a:latin typeface="Microsoft YaHei" pitchFamily="34" charset="0"/>
                 <a:ea typeface="Microsoft YaHei" pitchFamily="34" charset="-122"/>
